--- a/docs/jury/presentation.pptx
+++ b/docs/jury/presentation.pptx
@@ -4088,7 +4088,7 @@
               </a:defRPr>
             </a:pPr>
             <a:r>
-              <a:t>•  Проверено: штат группы ВТБ вырос на 13 % в 2024 году (Коммерсантъ, 07.04.2025; весь штат, не только ИТ)</a:t>
+              <a:t>•  Проверено (Коммерсантъ, 07.04.2025, весь штат, не только ИТ): штат группы ВТБ вырос на 13 % в 2024 году, штат Сбербанка на 3,9 %</a:t>
             </a:r>
           </a:p>
           <a:p>
@@ -4376,7 +4376,7 @@
               </a:defRPr>
             </a:pPr>
             <a:r>
-              <a:t>Финансовая модель на одной странице: docs/jury/06_financial_model.md</a:t>
+              <a:t>Зона интереса трека: «тренажёры для обучения сотрудников … автоматическая обратная связь». Финмодель: docs/jury/06_financial_model.md</a:t>
             </a:r>
           </a:p>
         </p:txBody>
@@ -4809,7 +4809,7 @@
               <a:spcAft>
                 <a:spcPts val="1000"/>
               </a:spcAft>
-              <a:defRPr sz="2200" b="0">
+              <a:defRPr sz="2000" b="0">
                 <a:solidFill>
                   <a:srgbClr val="141E33"/>
                 </a:solidFill>
@@ -4824,7 +4824,7 @@
               <a:spcAft>
                 <a:spcPts val="1000"/>
               </a:spcAft>
-              <a:defRPr sz="2200" b="0">
+              <a:defRPr sz="2000" b="0">
                 <a:solidFill>
                   <a:srgbClr val="141E33"/>
                 </a:solidFill>
@@ -4839,7 +4839,7 @@
               <a:spcAft>
                 <a:spcPts val="1000"/>
               </a:spcAft>
-              <a:defRPr sz="2200" b="0">
+              <a:defRPr sz="2000" b="0">
                 <a:solidFill>
                   <a:srgbClr val="141E33"/>
                 </a:solidFill>
@@ -4847,6 +4847,21 @@
             </a:pPr>
             <a:r>
               <a:t>•  Код и ответы сотрудников нельзя отправлять во внешние облачные сервисы</a:t>
+            </a:r>
+          </a:p>
+          <a:p>
+            <a:pPr>
+              <a:spcAft>
+                <a:spcPts val="1000"/>
+              </a:spcAft>
+              <a:defRPr sz="2000" b="0">
+                <a:solidFill>
+                  <a:srgbClr val="141E33"/>
+                </a:solidFill>
+              </a:defRPr>
+            </a:pPr>
+            <a:r>
+              <a:t>•  Проверяемые данные (про интервью в целом): опрос Hays и Хабр Карьеры 2020, 2 895 респондентов, 48 % специалистов хотя бы раз отказывались от оффера из-за негативного опыта интервью, 40 % связывают его с плохой организацией процесса</a:t>
             </a:r>
           </a:p>
         </p:txBody>
@@ -4884,7 +4899,7 @@
               </a:defRPr>
             </a:pPr>
             <a:r>
-              <a:t>Это гипотезы команды; результаты интервью: docs/jury/02_interviews.md</a:t>
+              <a:t>Источник: habr.com/en/companies/habr_career/articles/530598 (30.11.2020). Опрос про найм в целом, не только банки. Первые три пункта: гипотезы команды, проверяем интервью.</a:t>
             </a:r>
           </a:p>
         </p:txBody>
